--- a/MTBLS242_forecast/mtbls242_forecast_correction.pptx
+++ b/MTBLS242_forecast/mtbls242_forecast_correction.pptx
@@ -3167,7 +3167,7 @@
               </a:lnSpc>
             </a:pPr>
             <a:r>
-              <a:rPr sz="5400" b="1" i="0">
+              <a:rPr sz="5000" b="1" i="0">
                 <a:solidFill>
                   <a:srgbClr val="1A1A1A"/>
                 </a:solidFill>
@@ -3362,7 +3362,7 @@
               </a:lnSpc>
             </a:pPr>
             <a:r>
-              <a:rPr sz="3000" b="1" i="0">
+              <a:rPr sz="2700" b="1" i="0">
                 <a:solidFill>
                   <a:srgbClr val="1A1A1A"/>
                 </a:solidFill>
@@ -3484,7 +3484,7 @@
               </a:lnSpc>
             </a:pPr>
             <a:r>
-              <a:rPr sz="1700" b="1" i="0">
+              <a:rPr sz="1600" b="1" i="0">
                 <a:solidFill>
                   <a:srgbClr val="1A1A1A"/>
                 </a:solidFill>
@@ -3523,7 +3523,7 @@
               </a:lnSpc>
             </a:pPr>
             <a:r>
-              <a:rPr sz="1300" b="0" i="0">
+              <a:rPr sz="1250" b="0" i="0">
                 <a:solidFill>
                   <a:srgbClr val="666666"/>
                 </a:solidFill>
@@ -3601,7 +3601,7 @@
               </a:lnSpc>
             </a:pPr>
             <a:r>
-              <a:rPr sz="1700" b="1" i="0">
+              <a:rPr sz="1600" b="1" i="0">
                 <a:solidFill>
                   <a:srgbClr val="1A1A1A"/>
                 </a:solidFill>
@@ -3640,7 +3640,7 @@
               </a:lnSpc>
             </a:pPr>
             <a:r>
-              <a:rPr sz="1300" b="0" i="0">
+              <a:rPr sz="1250" b="0" i="0">
                 <a:solidFill>
                   <a:srgbClr val="666666"/>
                 </a:solidFill>
@@ -3718,7 +3718,7 @@
               </a:lnSpc>
             </a:pPr>
             <a:r>
-              <a:rPr sz="1700" b="1" i="0">
+              <a:rPr sz="1600" b="1" i="0">
                 <a:solidFill>
                   <a:srgbClr val="1A1A1A"/>
                 </a:solidFill>
@@ -3757,7 +3757,7 @@
               </a:lnSpc>
             </a:pPr>
             <a:r>
-              <a:rPr sz="1300" b="0" i="0">
+              <a:rPr sz="1250" b="0" i="0">
                 <a:solidFill>
                   <a:srgbClr val="666666"/>
                 </a:solidFill>
@@ -3840,7 +3840,7 @@
               </a:lnSpc>
             </a:pPr>
             <a:r>
-              <a:rPr sz="1300" b="0" i="0">
+              <a:rPr sz="1250" b="0" i="0">
                 <a:solidFill>
                   <a:srgbClr val="666666"/>
                 </a:solidFill>
@@ -3856,7 +3856,7 @@
               </a:lnSpc>
             </a:pPr>
             <a:r>
-              <a:rPr sz="1300" b="0" i="0">
+              <a:rPr sz="1250" b="0" i="0">
                 <a:solidFill>
                   <a:srgbClr val="666666"/>
                 </a:solidFill>
@@ -3952,7 +3952,7 @@
               </a:lnSpc>
             </a:pPr>
             <a:r>
-              <a:rPr sz="3000" b="1" i="0">
+              <a:rPr sz="2700" b="1" i="0">
                 <a:solidFill>
                   <a:srgbClr val="1A1A1A"/>
                 </a:solidFill>
@@ -4059,7 +4059,7 @@
               </a:lnSpc>
             </a:pPr>
             <a:r>
-              <a:rPr sz="1300" b="0" i="0">
+              <a:rPr sz="1250" b="0" i="0">
                 <a:solidFill>
                   <a:srgbClr val="1A1A1A"/>
                 </a:solidFill>
@@ -4075,7 +4075,7 @@
               </a:lnSpc>
             </a:pPr>
             <a:r>
-              <a:rPr sz="1300" b="0" i="0">
+              <a:rPr sz="1250" b="0" i="0">
                 <a:solidFill>
                   <a:srgbClr val="1A1A1A"/>
                 </a:solidFill>
@@ -4091,7 +4091,7 @@
               </a:lnSpc>
             </a:pPr>
             <a:r>
-              <a:rPr sz="1300" b="0" i="0">
+              <a:rPr sz="1250" b="0" i="0">
                 <a:solidFill>
                   <a:srgbClr val="1A1A1A"/>
                 </a:solidFill>
@@ -4107,13 +4107,29 @@
               </a:lnSpc>
             </a:pPr>
             <a:r>
-              <a:rPr sz="1300" b="0" i="0">
+              <a:rPr sz="1250" b="0" i="0">
                 <a:solidFill>
                   <a:srgbClr val="1A1A1A"/>
                 </a:solidFill>
                 <a:latin typeface="Helvetica Neue"/>
               </a:rPr>
-              <a:t>The pooled R² of 0.931 is not performance: it is driven by scale differences between metabolites. Median per-metabolite R² is -0.013.</a:t>
+              <a:t>The pooled R² of 0.931 is not performance: it is driven by scale differences between metabolites. Median</a:t>
+            </a:r>
+          </a:p>
+          <a:p>
+            <a:pPr algn="l">
+              <a:lnSpc>
+                <a:spcPct val="130000"/>
+              </a:lnSpc>
+            </a:pPr>
+            <a:r>
+              <a:rPr sz="1250" b="0" i="0">
+                <a:solidFill>
+                  <a:srgbClr val="1A1A1A"/>
+                </a:solidFill>
+                <a:latin typeface="Helvetica Neue"/>
+              </a:rPr>
+              <a:t>per-metabolite R² is -0.013.</a:t>
             </a:r>
           </a:p>
         </p:txBody>
@@ -4203,7 +4219,7 @@
               </a:lnSpc>
             </a:pPr>
             <a:r>
-              <a:rPr sz="3000" b="1" i="0">
+              <a:rPr sz="2700" b="1" i="0">
                 <a:solidFill>
                   <a:srgbClr val="1A1A1A"/>
                 </a:solidFill>
@@ -4286,7 +4302,7 @@
               </a:lnSpc>
             </a:pPr>
             <a:r>
-              <a:rPr sz="1500" b="1" i="0">
+              <a:rPr sz="1450" b="1" i="0">
                 <a:solidFill>
                   <a:srgbClr val="1F6F8B"/>
                 </a:solidFill>
@@ -4325,7 +4341,7 @@
               </a:lnSpc>
             </a:pPr>
             <a:r>
-              <a:rPr sz="1250" b="0" i="0">
+              <a:rPr sz="1200" b="0" i="0">
                 <a:solidFill>
                   <a:srgbClr val="1A1A1A"/>
                 </a:solidFill>
@@ -4364,7 +4380,7 @@
               </a:lnSpc>
             </a:pPr>
             <a:r>
-              <a:rPr sz="1500" b="1" i="0">
+              <a:rPr sz="1450" b="1" i="0">
                 <a:solidFill>
                   <a:srgbClr val="1F6F8B"/>
                 </a:solidFill>
@@ -4403,7 +4419,7 @@
               </a:lnSpc>
             </a:pPr>
             <a:r>
-              <a:rPr sz="1250" b="0" i="0">
+              <a:rPr sz="1200" b="0" i="0">
                 <a:solidFill>
                   <a:srgbClr val="1A1A1A"/>
                 </a:solidFill>
@@ -4442,7 +4458,7 @@
               </a:lnSpc>
             </a:pPr>
             <a:r>
-              <a:rPr sz="1500" b="1" i="0">
+              <a:rPr sz="1450" b="1" i="0">
                 <a:solidFill>
                   <a:srgbClr val="1F6F8B"/>
                 </a:solidFill>
@@ -4481,7 +4497,7 @@
               </a:lnSpc>
             </a:pPr>
             <a:r>
-              <a:rPr sz="1250" b="0" i="0">
+              <a:rPr sz="1200" b="0" i="0">
                 <a:solidFill>
                   <a:srgbClr val="1A1A1A"/>
                 </a:solidFill>
@@ -4520,7 +4536,7 @@
               </a:lnSpc>
             </a:pPr>
             <a:r>
-              <a:rPr sz="1500" b="1" i="0">
+              <a:rPr sz="1450" b="1" i="0">
                 <a:solidFill>
                   <a:srgbClr val="1F6F8B"/>
                 </a:solidFill>
@@ -4559,7 +4575,7 @@
               </a:lnSpc>
             </a:pPr>
             <a:r>
-              <a:rPr sz="1250" b="0" i="0">
+              <a:rPr sz="1200" b="0" i="0">
                 <a:solidFill>
                   <a:srgbClr val="1A1A1A"/>
                 </a:solidFill>
@@ -4642,7 +4658,7 @@
               </a:lnSpc>
             </a:pPr>
             <a:r>
-              <a:rPr sz="1300" b="1" i="0">
+              <a:rPr sz="1250" b="1" i="0">
                 <a:solidFill>
                   <a:srgbClr val="1A1A1A"/>
                 </a:solidFill>
@@ -4738,7 +4754,7 @@
               </a:lnSpc>
             </a:pPr>
             <a:r>
-              <a:rPr sz="3000" b="1" i="0">
+              <a:rPr sz="2700" b="1" i="0">
                 <a:solidFill>
                   <a:srgbClr val="1A1A1A"/>
                 </a:solidFill>
@@ -4821,7 +4837,7 @@
               </a:lnSpc>
             </a:pPr>
             <a:r>
-              <a:rPr sz="1800" b="0" i="0">
+              <a:rPr sz="1700" b="0" i="0">
                 <a:solidFill>
                   <a:srgbClr val="1A1A1A"/>
                 </a:solidFill>
@@ -4837,7 +4853,7 @@
               </a:lnSpc>
             </a:pPr>
             <a:r>
-              <a:rPr sz="1800" b="0" i="0">
+              <a:rPr sz="1700" b="0" i="0">
                 <a:solidFill>
                   <a:srgbClr val="1A1A1A"/>
                 </a:solidFill>
@@ -4853,7 +4869,7 @@
               </a:lnSpc>
             </a:pPr>
             <a:r>
-              <a:rPr sz="1800" b="0" i="0">
+              <a:rPr sz="1700" b="0" i="0">
                 <a:solidFill>
                   <a:srgbClr val="1A1A1A"/>
                 </a:solidFill>
@@ -4869,7 +4885,7 @@
               </a:lnSpc>
             </a:pPr>
             <a:r>
-              <a:rPr sz="1800" b="0" i="0">
+              <a:rPr sz="1700" b="0" i="0">
                 <a:solidFill>
                   <a:srgbClr val="1A1A1A"/>
                 </a:solidFill>
@@ -4885,7 +4901,7 @@
               </a:lnSpc>
             </a:pPr>
             <a:r>
-              <a:rPr sz="1800" b="0" i="0">
+              <a:rPr sz="1700" b="0" i="0">
                 <a:solidFill>
                   <a:srgbClr val="1A1A1A"/>
                 </a:solidFill>
@@ -4901,7 +4917,7 @@
               </a:lnSpc>
             </a:pPr>
             <a:r>
-              <a:rPr sz="1800" b="0" i="0">
+              <a:rPr sz="1700" b="0" i="0">
                 <a:solidFill>
                   <a:srgbClr val="1A1A1A"/>
                 </a:solidFill>
@@ -4920,7 +4936,7 @@
         </p:nvSpPr>
         <p:spPr>
           <a:xfrm>
-            <a:off x="685800" y="4754880"/>
+            <a:off x="685800" y="4892040"/>
             <a:ext cx="10820095" cy="9525"/>
           </a:xfrm>
           <a:prstGeom prst="rect">
@@ -4964,7 +4980,7 @@
         </p:nvSpPr>
         <p:spPr>
           <a:xfrm>
-            <a:off x="685800" y="4937760"/>
+            <a:off x="685800" y="5074920"/>
             <a:ext cx="10820095" cy="1280160"/>
           </a:xfrm>
           <a:prstGeom prst="rect">
@@ -4984,7 +5000,7 @@
               </a:lnSpc>
             </a:pPr>
             <a:r>
-              <a:rPr sz="1200" b="0" i="0">
+              <a:rPr sz="1150" b="0" i="0">
                 <a:solidFill>
                   <a:srgbClr val="666666"/>
                 </a:solidFill>
@@ -5000,7 +5016,7 @@
               </a:lnSpc>
             </a:pPr>
             <a:r>
-              <a:rPr sz="1200" b="0" i="0">
+              <a:rPr sz="1150" b="0" i="0">
                 <a:solidFill>
                   <a:srgbClr val="666666"/>
                 </a:solidFill>
@@ -5016,7 +5032,7 @@
               </a:lnSpc>
             </a:pPr>
             <a:r>
-              <a:rPr sz="1200" b="0" i="0">
+              <a:rPr sz="1150" b="0" i="0">
                 <a:solidFill>
                   <a:srgbClr val="666666"/>
                 </a:solidFill>
@@ -5112,7 +5128,7 @@
               </a:lnSpc>
             </a:pPr>
             <a:r>
-              <a:rPr sz="3000" b="1" i="0">
+              <a:rPr sz="2700" b="1" i="0">
                 <a:solidFill>
                   <a:srgbClr val="1A1A1A"/>
                 </a:solidFill>
@@ -5195,7 +5211,7 @@
               </a:lnSpc>
             </a:pPr>
             <a:r>
-              <a:rPr sz="2200" b="0" i="0">
+              <a:rPr sz="2100" b="0" i="0">
                 <a:solidFill>
                   <a:srgbClr val="1A1A1A"/>
                 </a:solidFill>
@@ -5211,7 +5227,7 @@
               </a:lnSpc>
             </a:pPr>
             <a:r>
-              <a:rPr sz="2200" b="0" i="0">
+              <a:rPr sz="2100" b="0" i="0">
                 <a:solidFill>
                   <a:srgbClr val="1A1A1A"/>
                 </a:solidFill>
@@ -5644,7 +5660,7 @@
               </a:lnSpc>
             </a:pPr>
             <a:r>
-              <a:rPr sz="3000" b="1" i="0">
+              <a:rPr sz="2700" b="1" i="0">
                 <a:solidFill>
                   <a:srgbClr val="1A1A1A"/>
                 </a:solidFill>
@@ -6089,7 +6105,7 @@
               </a:lnSpc>
             </a:pPr>
             <a:r>
-              <a:rPr sz="3000" b="1" i="0">
+              <a:rPr sz="2700" b="1" i="0">
                 <a:solidFill>
                   <a:srgbClr val="1A1A1A"/>
                 </a:solidFill>
@@ -6172,7 +6188,7 @@
               </a:lnSpc>
             </a:pPr>
             <a:r>
-              <a:rPr sz="1300" b="0" i="0">
+              <a:rPr sz="1250" b="0" i="0">
                 <a:solidFill>
                   <a:srgbClr val="666666"/>
                 </a:solidFill>
@@ -6188,7 +6204,7 @@
               </a:lnSpc>
             </a:pPr>
             <a:r>
-              <a:rPr sz="1300" b="0" i="0">
+              <a:rPr sz="1250" b="0" i="0">
                 <a:solidFill>
                   <a:srgbClr val="666666"/>
                 </a:solidFill>
@@ -6347,7 +6363,7 @@
               </a:lnSpc>
             </a:pPr>
             <a:r>
-              <a:rPr sz="3000" b="1" i="0">
+              <a:rPr sz="2700" b="1" i="0">
                 <a:solidFill>
                   <a:srgbClr val="1A1A1A"/>
                 </a:solidFill>
@@ -6430,7 +6446,7 @@
               </a:lnSpc>
             </a:pPr>
             <a:r>
-              <a:rPr sz="1400" b="0" i="0">
+              <a:rPr sz="1350" b="0" i="0">
                 <a:solidFill>
                   <a:srgbClr val="1A1A1A"/>
                 </a:solidFill>
@@ -6446,7 +6462,7 @@
               </a:lnSpc>
             </a:pPr>
             <a:r>
-              <a:rPr sz="1400" b="0" i="0">
+              <a:rPr sz="1350" b="0" i="0">
                 <a:solidFill>
                   <a:srgbClr val="1A1A1A"/>
                 </a:solidFill>
@@ -6719,7 +6735,7 @@
               </a:lnSpc>
             </a:pPr>
             <a:r>
-              <a:rPr sz="2200" b="1" i="0">
+              <a:rPr sz="2100" b="1" i="0">
                 <a:solidFill>
                   <a:srgbClr val="B2182B"/>
                 </a:solidFill>
@@ -6735,7 +6751,7 @@
               </a:lnSpc>
             </a:pPr>
             <a:r>
-              <a:rPr sz="2200" b="1" i="0">
+              <a:rPr sz="2100" b="1" i="0">
                 <a:solidFill>
                   <a:srgbClr val="B2182B"/>
                 </a:solidFill>
@@ -6831,7 +6847,7 @@
               </a:lnSpc>
             </a:pPr>
             <a:r>
-              <a:rPr sz="3000" b="1" i="0">
+              <a:rPr sz="2700" b="1" i="0">
                 <a:solidFill>
                   <a:srgbClr val="1A1A1A"/>
                 </a:solidFill>
@@ -6914,7 +6930,7 @@
               </a:lnSpc>
             </a:pPr>
             <a:r>
-              <a:rPr sz="1600" b="0" i="0">
+              <a:rPr sz="1550" b="0" i="0">
                 <a:solidFill>
                   <a:srgbClr val="666666"/>
                 </a:solidFill>
@@ -6953,7 +6969,7 @@
               </a:lnSpc>
             </a:pPr>
             <a:r>
-              <a:rPr sz="5200" b="1" i="0">
+              <a:rPr sz="5000" b="1" i="0">
                 <a:solidFill>
                   <a:srgbClr val="B2182B"/>
                 </a:solidFill>
@@ -6992,7 +7008,7 @@
               </a:lnSpc>
             </a:pPr>
             <a:r>
-              <a:rPr sz="1700" b="0" i="0">
+              <a:rPr sz="1600" b="0" i="0">
                 <a:solidFill>
                   <a:srgbClr val="1A1A1A"/>
                 </a:solidFill>
@@ -7008,7 +7024,7 @@
               </a:lnSpc>
             </a:pPr>
             <a:r>
-              <a:rPr sz="1700" b="0" i="0">
+              <a:rPr sz="1600" b="0" i="0">
                 <a:solidFill>
                   <a:srgbClr val="1A1A1A"/>
                 </a:solidFill>
@@ -7024,7 +7040,7 @@
               </a:lnSpc>
             </a:pPr>
             <a:r>
-              <a:rPr sz="1700" b="0" i="0">
+              <a:rPr sz="1600" b="0" i="0">
                 <a:solidFill>
                   <a:srgbClr val="1A1A1A"/>
                 </a:solidFill>
@@ -7040,7 +7056,7 @@
               </a:lnSpc>
             </a:pPr>
             <a:r>
-              <a:rPr sz="1700" b="0" i="0">
+              <a:rPr sz="1600" b="0" i="0">
                 <a:solidFill>
                   <a:srgbClr val="1A1A1A"/>
                 </a:solidFill>
@@ -7059,7 +7075,7 @@
         </p:nvSpPr>
         <p:spPr>
           <a:xfrm>
-            <a:off x="685800" y="5349240"/>
+            <a:off x="685800" y="5440680"/>
             <a:ext cx="10820095" cy="9525"/>
           </a:xfrm>
           <a:prstGeom prst="rect">
@@ -7103,7 +7119,7 @@
         </p:nvSpPr>
         <p:spPr>
           <a:xfrm>
-            <a:off x="685800" y="5532120"/>
+            <a:off x="685800" y="5623560"/>
             <a:ext cx="10820095" cy="822960"/>
           </a:xfrm>
           <a:prstGeom prst="rect">
@@ -7123,7 +7139,7 @@
               </a:lnSpc>
             </a:pPr>
             <a:r>
-              <a:rPr sz="1500" b="1" i="0">
+              <a:rPr sz="1450" b="1" i="0">
                 <a:solidFill>
                   <a:srgbClr val="1A1A1A"/>
                 </a:solidFill>
@@ -7139,7 +7155,7 @@
               </a:lnSpc>
             </a:pPr>
             <a:r>
-              <a:rPr sz="1500" b="1" i="0">
+              <a:rPr sz="1450" b="1" i="0">
                 <a:solidFill>
                   <a:srgbClr val="1A1A1A"/>
                 </a:solidFill>
@@ -7235,7 +7251,7 @@
               </a:lnSpc>
             </a:pPr>
             <a:r>
-              <a:rPr sz="3000" b="1" i="0">
+              <a:rPr sz="2700" b="1" i="0">
                 <a:solidFill>
                   <a:srgbClr val="1A1A1A"/>
                 </a:solidFill>
@@ -7600,7 +7616,7 @@
               </a:lnSpc>
             </a:pPr>
             <a:r>
-              <a:rPr sz="1400" b="0" i="0">
+              <a:rPr sz="1350" b="0" i="0">
                 <a:solidFill>
                   <a:srgbClr val="1A1A1A"/>
                 </a:solidFill>
@@ -7616,7 +7632,7 @@
               </a:lnSpc>
             </a:pPr>
             <a:r>
-              <a:rPr sz="1400" b="0" i="0">
+              <a:rPr sz="1350" b="0" i="0">
                 <a:solidFill>
                   <a:srgbClr val="1A1A1A"/>
                 </a:solidFill>
@@ -7632,7 +7648,7 @@
               </a:lnSpc>
             </a:pPr>
             <a:r>
-              <a:rPr sz="1400" b="0" i="0">
+              <a:rPr sz="1350" b="0" i="0">
                 <a:solidFill>
                   <a:srgbClr val="1A1A1A"/>
                 </a:solidFill>
@@ -7648,7 +7664,7 @@
               </a:lnSpc>
             </a:pPr>
             <a:r>
-              <a:rPr sz="1400" b="0" i="0">
+              <a:rPr sz="1350" b="0" i="0">
                 <a:solidFill>
                   <a:srgbClr val="1A1A1A"/>
                 </a:solidFill>
@@ -7664,7 +7680,7 @@
               </a:lnSpc>
             </a:pPr>
             <a:r>
-              <a:rPr sz="1400" b="0" i="0">
+              <a:rPr sz="1350" b="0" i="0">
                 <a:solidFill>
                   <a:srgbClr val="1A1A1A"/>
                 </a:solidFill>
@@ -7680,7 +7696,7 @@
               </a:lnSpc>
             </a:pPr>
             <a:r>
-              <a:rPr sz="1400" b="0" i="0">
+              <a:rPr sz="1350" b="0" i="0">
                 <a:solidFill>
                   <a:srgbClr val="1A1A1A"/>
                 </a:solidFill>
@@ -7776,7 +7792,7 @@
               </a:lnSpc>
             </a:pPr>
             <a:r>
-              <a:rPr sz="3000" b="1" i="0">
+              <a:rPr sz="2700" b="1" i="0">
                 <a:solidFill>
                   <a:srgbClr val="1A1A1A"/>
                 </a:solidFill>
@@ -8433,7 +8449,7 @@
               </a:lnSpc>
             </a:pPr>
             <a:r>
-              <a:rPr sz="1200" b="0" i="0">
+              <a:rPr sz="1150" b="0" i="0">
                 <a:solidFill>
                   <a:srgbClr val="666666"/>
                 </a:solidFill>
@@ -8449,7 +8465,7 @@
               </a:lnSpc>
             </a:pPr>
             <a:r>
-              <a:rPr sz="1200" b="0" i="0">
+              <a:rPr sz="1150" b="0" i="0">
                 <a:solidFill>
                   <a:srgbClr val="666666"/>
                 </a:solidFill>
@@ -8465,7 +8481,7 @@
               </a:lnSpc>
             </a:pPr>
             <a:r>
-              <a:rPr sz="1200" b="0" i="0">
+              <a:rPr sz="1150" b="0" i="0">
                 <a:solidFill>
                   <a:srgbClr val="666666"/>
                 </a:solidFill>
@@ -8561,7 +8577,7 @@
               </a:lnSpc>
             </a:pPr>
             <a:r>
-              <a:rPr sz="3000" b="1" i="0">
+              <a:rPr sz="2700" b="1" i="0">
                 <a:solidFill>
                   <a:srgbClr val="1A1A1A"/>
                 </a:solidFill>
@@ -8950,7 +8966,7 @@
               </a:lnSpc>
             </a:pPr>
             <a:r>
-              <a:rPr sz="2000" b="1" i="0">
+              <a:rPr sz="1700" b="1" i="0">
                 <a:solidFill>
                   <a:srgbClr val="B2182B"/>
                 </a:solidFill>

--- a/MTBLS242_forecast/mtbls242_forecast_correction.pptx
+++ b/MTBLS242_forecast/mtbls242_forecast_correction.pptx
@@ -18,6 +18,9 @@
     <p:sldId id="266" r:id="rId17"/>
     <p:sldId id="267" r:id="rId18"/>
     <p:sldId id="268" r:id="rId19"/>
+    <p:sldId id="269" r:id="rId20"/>
+    <p:sldId id="270" r:id="rId21"/>
+    <p:sldId id="271" r:id="rId22"/>
   </p:sldIdLst>
   <p:sldSz cx="12191695" cy="6858000" type="screen4x3"/>
   <p:notesSz cx="6858000" cy="9144000"/>
@@ -4186,7 +4189,7 @@
                 </a:solidFill>
                 <a:latin typeface="Helvetica Neue"/>
               </a:rPr>
-              <a:t>TAKEAWAY</a:t>
+              <a:t>USING EVERY TIME POINT</a:t>
             </a:r>
           </a:p>
         </p:txBody>
@@ -4225,7 +4228,7 @@
                 </a:solidFill>
                 <a:latin typeface="Helvetica Neue"/>
               </a:rPr>
-              <a:t>The controls, reusable</a:t>
+              <a:t>Using the whole trajectory</a:t>
             </a:r>
           </a:p>
         </p:txBody>
@@ -4282,319 +4285,495 @@
         </p:nvSpPr>
         <p:spPr>
           <a:xfrm>
-            <a:off x="685800" y="1828800"/>
-            <a:ext cx="3017520" cy="365760"/>
-          </a:xfrm>
-          <a:prstGeom prst="rect">
-            <a:avLst/>
-          </a:prstGeom>
-          <a:noFill/>
-        </p:spPr>
-        <p:txBody>
-          <a:bodyPr wrap="square">
-            <a:spAutoFit/>
-          </a:bodyPr>
-          <a:lstStyle/>
-          <a:p>
-            <a:pPr algn="l">
+            <a:off x="685800" y="1691640"/>
+            <a:ext cx="10820095" cy="822960"/>
+          </a:xfrm>
+          <a:prstGeom prst="rect">
+            <a:avLst/>
+          </a:prstGeom>
+          <a:noFill/>
+        </p:spPr>
+        <p:txBody>
+          <a:bodyPr wrap="square">
+            <a:spAutoFit/>
+          </a:bodyPr>
+          <a:lstStyle/>
+          <a:p>
+            <a:pPr algn="l">
+              <a:lnSpc>
+                <a:spcPct val="130000"/>
+              </a:lnSpc>
+            </a:pPr>
+            <a:r>
+              <a:rPr sz="1350" b="0" i="0">
+                <a:solidFill>
+                  <a:srgbClr val="1A1A1A"/>
+                </a:solidFill>
+                <a:latin typeface="Helvetica Neue"/>
+              </a:rPr>
+              <a:t>The pairwise experiments use 142 of 465 samples — 3, 6 and 9 months were discarded entirely.</a:t>
+            </a:r>
+          </a:p>
+          <a:p>
+            <a:pPr algn="l">
+              <a:lnSpc>
+                <a:spcPct val="130000"/>
+              </a:lnSpc>
+            </a:pPr>
+            <a:r>
+              <a:rPr sz="1350" b="0" i="0">
+                <a:solidFill>
+                  <a:srgbClr val="1A1A1A"/>
+                </a:solidFill>
+                <a:latin typeface="Helvetica Neue"/>
+              </a:rPr>
+              <a:t>Using them gives roughly five times more training data.</a:t>
+            </a:r>
+          </a:p>
+        </p:txBody>
+      </p:sp>
+      <p:sp>
+        <p:nvSpPr>
+          <p:cNvPr id="6" name="TextBox 5"/>
+          <p:cNvSpPr txBox="1"/>
+          <p:nvPr/>
+        </p:nvSpPr>
+        <p:spPr>
+          <a:xfrm>
+            <a:off x="685800" y="2880360"/>
+            <a:ext cx="3606698" cy="731520"/>
+          </a:xfrm>
+          <a:prstGeom prst="rect">
+            <a:avLst/>
+          </a:prstGeom>
+          <a:noFill/>
+        </p:spPr>
+        <p:txBody>
+          <a:bodyPr wrap="square">
+            <a:spAutoFit/>
+          </a:bodyPr>
+          <a:lstStyle/>
+          <a:p>
+            <a:pPr algn="ctr">
               <a:lnSpc>
                 <a:spcPct val="100000"/>
               </a:lnSpc>
             </a:pPr>
             <a:r>
-              <a:rPr sz="1450" b="1" i="0">
-                <a:solidFill>
-                  <a:srgbClr val="1F6F8B"/>
-                </a:solidFill>
-                <a:latin typeface="Helvetica Neue"/>
-              </a:rPr>
-              <a:t>No-learning scorer</a:t>
-            </a:r>
-          </a:p>
-        </p:txBody>
-      </p:sp>
-      <p:sp>
-        <p:nvSpPr>
-          <p:cNvPr id="6" name="TextBox 5"/>
-          <p:cNvSpPr txBox="1"/>
-          <p:nvPr/>
-        </p:nvSpPr>
-        <p:spPr>
-          <a:xfrm>
-            <a:off x="3886200" y="1828800"/>
-            <a:ext cx="7619695" cy="731520"/>
-          </a:xfrm>
-          <a:prstGeom prst="rect">
-            <a:avLst/>
-          </a:prstGeom>
-          <a:noFill/>
-        </p:spPr>
-        <p:txBody>
-          <a:bodyPr wrap="square">
-            <a:spAutoFit/>
-          </a:bodyPr>
-          <a:lstStyle/>
-          <a:p>
-            <a:pPr algn="l">
-              <a:lnSpc>
-                <a:spcPct val="125000"/>
+              <a:rPr sz="4000" b="1" i="0">
+                <a:solidFill>
+                  <a:srgbClr val="B2182B"/>
+                </a:solidFill>
+                <a:latin typeface="Helvetica Neue"/>
+              </a:rPr>
+              <a:t>346</a:t>
+            </a:r>
+          </a:p>
+        </p:txBody>
+      </p:sp>
+      <p:sp>
+        <p:nvSpPr>
+          <p:cNvPr id="7" name="TextBox 6"/>
+          <p:cNvSpPr txBox="1"/>
+          <p:nvPr/>
+        </p:nvSpPr>
+        <p:spPr>
+          <a:xfrm>
+            <a:off x="685800" y="3593592"/>
+            <a:ext cx="3606698" cy="548640"/>
+          </a:xfrm>
+          <a:prstGeom prst="rect">
+            <a:avLst/>
+          </a:prstGeom>
+          <a:noFill/>
+        </p:spPr>
+        <p:txBody>
+          <a:bodyPr wrap="square">
+            <a:spAutoFit/>
+          </a:bodyPr>
+          <a:lstStyle/>
+          <a:p>
+            <a:pPr algn="ctr">
+              <a:lnSpc>
+                <a:spcPct val="100000"/>
+              </a:lnSpc>
+            </a:pPr>
+            <a:r>
+              <a:rPr sz="1100" b="0" i="0">
+                <a:solidFill>
+                  <a:srgbClr val="666666"/>
+                </a:solidFill>
+                <a:latin typeface="Helvetica Neue"/>
+              </a:rPr>
+              <a:t>consecutive transitions</a:t>
+            </a:r>
+          </a:p>
+          <a:p>
+            <a:pPr algn="ctr">
+              <a:lnSpc>
+                <a:spcPct val="100000"/>
+              </a:lnSpc>
+            </a:pPr>
+            <a:r>
+              <a:rPr sz="1100" b="0" i="0">
+                <a:solidFill>
+                  <a:srgbClr val="666666"/>
+                </a:solidFill>
+                <a:latin typeface="Helvetica Neue"/>
+              </a:rPr>
+              <a:t>(vs 71 pairs)</a:t>
+            </a:r>
+          </a:p>
+        </p:txBody>
+      </p:sp>
+      <p:sp>
+        <p:nvSpPr>
+          <p:cNvPr id="8" name="TextBox 7"/>
+          <p:cNvSpPr txBox="1"/>
+          <p:nvPr/>
+        </p:nvSpPr>
+        <p:spPr>
+          <a:xfrm>
+            <a:off x="4292498" y="2880360"/>
+            <a:ext cx="3606698" cy="731520"/>
+          </a:xfrm>
+          <a:prstGeom prst="rect">
+            <a:avLst/>
+          </a:prstGeom>
+          <a:noFill/>
+        </p:spPr>
+        <p:txBody>
+          <a:bodyPr wrap="square">
+            <a:spAutoFit/>
+          </a:bodyPr>
+          <a:lstStyle/>
+          <a:p>
+            <a:pPr algn="ctr">
+              <a:lnSpc>
+                <a:spcPct val="100000"/>
+              </a:lnSpc>
+            </a:pPr>
+            <a:r>
+              <a:rPr sz="4000" b="1" i="0">
+                <a:solidFill>
+                  <a:srgbClr val="1A1A1A"/>
+                </a:solidFill>
+                <a:latin typeface="Helvetica Neue"/>
+              </a:rPr>
+              <a:t>465</a:t>
+            </a:r>
+          </a:p>
+        </p:txBody>
+      </p:sp>
+      <p:sp>
+        <p:nvSpPr>
+          <p:cNvPr id="9" name="TextBox 8"/>
+          <p:cNvSpPr txBox="1"/>
+          <p:nvPr/>
+        </p:nvSpPr>
+        <p:spPr>
+          <a:xfrm>
+            <a:off x="4292498" y="3593592"/>
+            <a:ext cx="3606698" cy="548640"/>
+          </a:xfrm>
+          <a:prstGeom prst="rect">
+            <a:avLst/>
+          </a:prstGeom>
+          <a:noFill/>
+        </p:spPr>
+        <p:txBody>
+          <a:bodyPr wrap="square">
+            <a:spAutoFit/>
+          </a:bodyPr>
+          <a:lstStyle/>
+          <a:p>
+            <a:pPr algn="ctr">
+              <a:lnSpc>
+                <a:spcPct val="100000"/>
+              </a:lnSpc>
+            </a:pPr>
+            <a:r>
+              <a:rPr sz="1100" b="0" i="0">
+                <a:solidFill>
+                  <a:srgbClr val="666666"/>
+                </a:solidFill>
+                <a:latin typeface="Helvetica Neue"/>
+              </a:rPr>
+              <a:t>samples used</a:t>
+            </a:r>
+          </a:p>
+          <a:p>
+            <a:pPr algn="ctr">
+              <a:lnSpc>
+                <a:spcPct val="100000"/>
+              </a:lnSpc>
+            </a:pPr>
+            <a:r>
+              <a:rPr sz="1100" b="0" i="0">
+                <a:solidFill>
+                  <a:srgbClr val="666666"/>
+                </a:solidFill>
+                <a:latin typeface="Helvetica Neue"/>
+              </a:rPr>
+              <a:t>(vs 142)</a:t>
+            </a:r>
+          </a:p>
+        </p:txBody>
+      </p:sp>
+      <p:sp>
+        <p:nvSpPr>
+          <p:cNvPr id="10" name="TextBox 9"/>
+          <p:cNvSpPr txBox="1"/>
+          <p:nvPr/>
+        </p:nvSpPr>
+        <p:spPr>
+          <a:xfrm>
+            <a:off x="7899196" y="2880360"/>
+            <a:ext cx="3606698" cy="731520"/>
+          </a:xfrm>
+          <a:prstGeom prst="rect">
+            <a:avLst/>
+          </a:prstGeom>
+          <a:noFill/>
+        </p:spPr>
+        <p:txBody>
+          <a:bodyPr wrap="square">
+            <a:spAutoFit/>
+          </a:bodyPr>
+          <a:lstStyle/>
+          <a:p>
+            <a:pPr algn="ctr">
+              <a:lnSpc>
+                <a:spcPct val="100000"/>
+              </a:lnSpc>
+            </a:pPr>
+            <a:r>
+              <a:rPr sz="4000" b="1" i="0">
+                <a:solidFill>
+                  <a:srgbClr val="1A1A1A"/>
+                </a:solidFill>
+                <a:latin typeface="Helvetica Neue"/>
+              </a:rPr>
+              <a:t>60</a:t>
+            </a:r>
+          </a:p>
+        </p:txBody>
+      </p:sp>
+      <p:sp>
+        <p:nvSpPr>
+          <p:cNvPr id="11" name="TextBox 10"/>
+          <p:cNvSpPr txBox="1"/>
+          <p:nvPr/>
+        </p:nvSpPr>
+        <p:spPr>
+          <a:xfrm>
+            <a:off x="7899196" y="3593592"/>
+            <a:ext cx="3606698" cy="548640"/>
+          </a:xfrm>
+          <a:prstGeom prst="rect">
+            <a:avLst/>
+          </a:prstGeom>
+          <a:noFill/>
+        </p:spPr>
+        <p:txBody>
+          <a:bodyPr wrap="square">
+            <a:spAutoFit/>
+          </a:bodyPr>
+          <a:lstStyle/>
+          <a:p>
+            <a:pPr algn="ctr">
+              <a:lnSpc>
+                <a:spcPct val="100000"/>
+              </a:lnSpc>
+            </a:pPr>
+            <a:r>
+              <a:rPr sz="1100" b="0" i="0">
+                <a:solidFill>
+                  <a:srgbClr val="666666"/>
+                </a:solidFill>
+                <a:latin typeface="Helvetica Neue"/>
+              </a:rPr>
+              <a:t>subjects with a complete</a:t>
+            </a:r>
+          </a:p>
+          <a:p>
+            <a:pPr algn="ctr">
+              <a:lnSpc>
+                <a:spcPct val="100000"/>
+              </a:lnSpc>
+            </a:pPr>
+            <a:r>
+              <a:rPr sz="1100" b="0" i="0">
+                <a:solidFill>
+                  <a:srgbClr val="666666"/>
+                </a:solidFill>
+                <a:latin typeface="Helvetica Neue"/>
+              </a:rPr>
+              <a:t>5-point trajectory</a:t>
+            </a:r>
+          </a:p>
+        </p:txBody>
+      </p:sp>
+      <p:sp>
+        <p:nvSpPr>
+          <p:cNvPr id="12" name="TextBox 11"/>
+          <p:cNvSpPr txBox="1"/>
+          <p:nvPr/>
+        </p:nvSpPr>
+        <p:spPr>
+          <a:xfrm>
+            <a:off x="685800" y="4846320"/>
+            <a:ext cx="10820095" cy="1188720"/>
+          </a:xfrm>
+          <a:prstGeom prst="rect">
+            <a:avLst/>
+          </a:prstGeom>
+          <a:noFill/>
+        </p:spPr>
+        <p:txBody>
+          <a:bodyPr wrap="square">
+            <a:spAutoFit/>
+          </a:bodyPr>
+          <a:lstStyle/>
+          <a:p>
+            <a:pPr algn="l">
+              <a:lnSpc>
+                <a:spcPct val="130000"/>
               </a:lnSpc>
             </a:pPr>
             <a:r>
               <a:rPr sz="1200" b="0" i="0">
                 <a:solidFill>
+                  <a:srgbClr val="666666"/>
+                </a:solidFill>
+                <a:latin typeface="Helvetica Neue"/>
+              </a:rPr>
+              <a:t>Subject-grouped 5-fold CV — one subject contributes up to four transitions, so splitting rows at random</a:t>
+            </a:r>
+          </a:p>
+          <a:p>
+            <a:pPr algn="l">
+              <a:lnSpc>
+                <a:spcPct val="130000"/>
+              </a:lnSpc>
+            </a:pPr>
+            <a:r>
+              <a:rPr sz="1200" b="0" i="0">
+                <a:solidFill>
+                  <a:srgbClr val="666666"/>
+                </a:solidFill>
+                <a:latin typeface="Helvetica Neue"/>
+              </a:rPr>
+              <a:t>would put the same person in train and test. Persistence, not the cohort mean, is the baseline that matters over a three-month gap.</a:t>
+            </a:r>
+          </a:p>
+        </p:txBody>
+      </p:sp>
+    </p:spTree>
+  </p:cSld>
+  <p:clrMapOvr>
+    <a:masterClrMapping/>
+  </p:clrMapOvr>
+</p:sld>
+</file>
+
+<file path=ppt/slides/slide13.xml><?xml version="1.0" encoding="utf-8"?>
+<p:sld xmlns:a="http://schemas.openxmlformats.org/drawingml/2006/main" xmlns:p="http://schemas.openxmlformats.org/presentationml/2006/main" xmlns:r="http://schemas.openxmlformats.org/officeDocument/2006/relationships">
+  <p:cSld>
+    <p:spTree>
+      <p:nvGrpSpPr>
+        <p:cNvPr id="1" name=""/>
+        <p:cNvGrpSpPr/>
+        <p:nvPr/>
+      </p:nvGrpSpPr>
+      <p:grpSpPr/>
+      <p:sp>
+        <p:nvSpPr>
+          <p:cNvPr id="2" name="TextBox 1"/>
+          <p:cNvSpPr txBox="1"/>
+          <p:nvPr/>
+        </p:nvSpPr>
+        <p:spPr>
+          <a:xfrm>
+            <a:off x="685800" y="384048"/>
+            <a:ext cx="10820095" cy="274320"/>
+          </a:xfrm>
+          <a:prstGeom prst="rect">
+            <a:avLst/>
+          </a:prstGeom>
+          <a:noFill/>
+        </p:spPr>
+        <p:txBody>
+          <a:bodyPr wrap="square">
+            <a:spAutoFit/>
+          </a:bodyPr>
+          <a:lstStyle/>
+          <a:p>
+            <a:pPr algn="l">
+              <a:lnSpc>
+                <a:spcPct val="100000"/>
+              </a:lnSpc>
+            </a:pPr>
+            <a:r>
+              <a:rPr sz="1100" b="1" i="0">
+                <a:solidFill>
+                  <a:srgbClr val="666666"/>
+                </a:solidFill>
+                <a:latin typeface="Helvetica Neue"/>
+              </a:rPr>
+              <a:t>USING EVERY TIME POINT</a:t>
+            </a:r>
+          </a:p>
+        </p:txBody>
+      </p:sp>
+      <p:sp>
+        <p:nvSpPr>
+          <p:cNvPr id="3" name="TextBox 2"/>
+          <p:cNvSpPr txBox="1"/>
+          <p:nvPr/>
+        </p:nvSpPr>
+        <p:spPr>
+          <a:xfrm>
+            <a:off x="685800" y="658368"/>
+            <a:ext cx="10820095" cy="822960"/>
+          </a:xfrm>
+          <a:prstGeom prst="rect">
+            <a:avLst/>
+          </a:prstGeom>
+          <a:noFill/>
+        </p:spPr>
+        <p:txBody>
+          <a:bodyPr wrap="square">
+            <a:spAutoFit/>
+          </a:bodyPr>
+          <a:lstStyle/>
+          <a:p>
+            <a:pPr algn="l">
+              <a:lnSpc>
+                <a:spcPct val="100000"/>
+              </a:lnSpc>
+            </a:pPr>
+            <a:r>
+              <a:rPr sz="2700" b="1" i="0">
+                <a:solidFill>
                   <a:srgbClr val="1A1A1A"/>
                 </a:solidFill>
                 <a:latin typeface="Helvetica Neue"/>
               </a:rPr>
-              <a:t>Sum of signed, z-scored baseline markers. Catches a model that has not converged or has learned nothing its inputs did not already say. Every trained model is reported next to it.</a:t>
-            </a:r>
-          </a:p>
-        </p:txBody>
-      </p:sp>
-      <p:sp>
-        <p:nvSpPr>
-          <p:cNvPr id="7" name="TextBox 6"/>
-          <p:cNvSpPr txBox="1"/>
-          <p:nvPr/>
-        </p:nvSpPr>
-        <p:spPr>
-          <a:xfrm>
-            <a:off x="685800" y="2834640"/>
-            <a:ext cx="3017520" cy="365760"/>
-          </a:xfrm>
-          <a:prstGeom prst="rect">
-            <a:avLst/>
-          </a:prstGeom>
-          <a:noFill/>
-        </p:spPr>
-        <p:txBody>
-          <a:bodyPr wrap="square">
-            <a:spAutoFit/>
-          </a:bodyPr>
-          <a:lstStyle/>
-          <a:p>
-            <a:pPr algn="l">
-              <a:lnSpc>
-                <a:spcPct val="100000"/>
-              </a:lnSpc>
-            </a:pPr>
-            <a:r>
-              <a:rPr sz="1450" b="1" i="0">
-                <a:solidFill>
-                  <a:srgbClr val="1F6F8B"/>
-                </a:solidFill>
-                <a:latin typeface="Helvetica Neue"/>
-              </a:rPr>
-              <a:t>Pairing-destroyed null</a:t>
-            </a:r>
-          </a:p>
-        </p:txBody>
-      </p:sp>
-      <p:sp>
-        <p:nvSpPr>
-          <p:cNvPr id="8" name="TextBox 7"/>
-          <p:cNvSpPr txBox="1"/>
-          <p:nvPr/>
-        </p:nvSpPr>
-        <p:spPr>
-          <a:xfrm>
-            <a:off x="3886200" y="2834640"/>
-            <a:ext cx="7619695" cy="731520"/>
-          </a:xfrm>
-          <a:prstGeom prst="rect">
-            <a:avLst/>
-          </a:prstGeom>
-          <a:noFill/>
-        </p:spPr>
-        <p:txBody>
-          <a:bodyPr wrap="square">
-            <a:spAutoFit/>
-          </a:bodyPr>
-          <a:lstStyle/>
-          <a:p>
-            <a:pPr algn="l">
-              <a:lnSpc>
-                <a:spcPct val="125000"/>
-              </a:lnSpc>
-            </a:pPr>
-            <a:r>
-              <a:rPr sz="1200" b="0" i="0">
-                <a:solidFill>
-                  <a:srgbClr val="1A1A1A"/>
-                </a:solidFill>
-                <a:latin typeface="Helvetica Neue"/>
-              </a:rPr>
-              <a:t>Shuffle which future belongs to which subject, then rebuild the outcome from scratch. Catches an outcome manufactured from the features. This is the one that mattered.</a:t>
-            </a:r>
-          </a:p>
-        </p:txBody>
-      </p:sp>
-      <p:sp>
-        <p:nvSpPr>
-          <p:cNvPr id="9" name="TextBox 8"/>
-          <p:cNvSpPr txBox="1"/>
-          <p:nvPr/>
-        </p:nvSpPr>
-        <p:spPr>
-          <a:xfrm>
-            <a:off x="685800" y="3840480"/>
-            <a:ext cx="3017520" cy="365760"/>
-          </a:xfrm>
-          <a:prstGeom prst="rect">
-            <a:avLst/>
-          </a:prstGeom>
-          <a:noFill/>
-        </p:spPr>
-        <p:txBody>
-          <a:bodyPr wrap="square">
-            <a:spAutoFit/>
-          </a:bodyPr>
-          <a:lstStyle/>
-          <a:p>
-            <a:pPr algn="l">
-              <a:lnSpc>
-                <a:spcPct val="100000"/>
-              </a:lnSpc>
-            </a:pPr>
-            <a:r>
-              <a:rPr sz="1450" b="1" i="0">
-                <a:solidFill>
-                  <a:srgbClr val="1F6F8B"/>
-                </a:solidFill>
-                <a:latin typeface="Helvetica Neue"/>
-              </a:rPr>
-              <a:t>Label-permutation test</a:t>
-            </a:r>
-          </a:p>
-        </p:txBody>
-      </p:sp>
-      <p:sp>
-        <p:nvSpPr>
-          <p:cNvPr id="10" name="TextBox 9"/>
-          <p:cNvSpPr txBox="1"/>
-          <p:nvPr/>
-        </p:nvSpPr>
-        <p:spPr>
-          <a:xfrm>
-            <a:off x="3886200" y="3840480"/>
-            <a:ext cx="7619695" cy="731520"/>
-          </a:xfrm>
-          <a:prstGeom prst="rect">
-            <a:avLst/>
-          </a:prstGeom>
-          <a:noFill/>
-        </p:spPr>
-        <p:txBody>
-          <a:bodyPr wrap="square">
-            <a:spAutoFit/>
-          </a:bodyPr>
-          <a:lstStyle/>
-          <a:p>
-            <a:pPr algn="l">
-              <a:lnSpc>
-                <a:spcPct val="125000"/>
-              </a:lnSpc>
-            </a:pPr>
-            <a:r>
-              <a:rPr sz="1200" b="0" i="0">
-                <a:solidFill>
-                  <a:srgbClr val="1A1A1A"/>
-                </a:solidFill>
-                <a:latin typeface="Helvetica Neue"/>
-              </a:rPr>
-              <a:t>Necessary, and demonstrably not sufficient — it returned p = 0.002 on the broken setup.</a:t>
-            </a:r>
-          </a:p>
-        </p:txBody>
-      </p:sp>
-      <p:sp>
-        <p:nvSpPr>
-          <p:cNvPr id="11" name="TextBox 10"/>
-          <p:cNvSpPr txBox="1"/>
-          <p:nvPr/>
-        </p:nvSpPr>
-        <p:spPr>
-          <a:xfrm>
-            <a:off x="685800" y="4846320"/>
-            <a:ext cx="3017520" cy="365760"/>
-          </a:xfrm>
-          <a:prstGeom prst="rect">
-            <a:avLst/>
-          </a:prstGeom>
-          <a:noFill/>
-        </p:spPr>
-        <p:txBody>
-          <a:bodyPr wrap="square">
-            <a:spAutoFit/>
-          </a:bodyPr>
-          <a:lstStyle/>
-          <a:p>
-            <a:pPr algn="l">
-              <a:lnSpc>
-                <a:spcPct val="100000"/>
-              </a:lnSpc>
-            </a:pPr>
-            <a:r>
-              <a:rPr sz="1450" b="1" i="0">
-                <a:solidFill>
-                  <a:srgbClr val="1F6F8B"/>
-                </a:solidFill>
-                <a:latin typeface="Helvetica Neue"/>
-              </a:rPr>
-              <a:t>Paired bootstrap intervals</a:t>
-            </a:r>
-          </a:p>
-        </p:txBody>
-      </p:sp>
-      <p:sp>
-        <p:nvSpPr>
-          <p:cNvPr id="12" name="TextBox 11"/>
-          <p:cNvSpPr txBox="1"/>
-          <p:nvPr/>
-        </p:nvSpPr>
-        <p:spPr>
-          <a:xfrm>
-            <a:off x="3886200" y="4846320"/>
-            <a:ext cx="7619695" cy="731520"/>
-          </a:xfrm>
-          <a:prstGeom prst="rect">
-            <a:avLst/>
-          </a:prstGeom>
-          <a:noFill/>
-        </p:spPr>
-        <p:txBody>
-          <a:bodyPr wrap="square">
-            <a:spAutoFit/>
-          </a:bodyPr>
-          <a:lstStyle/>
-          <a:p>
-            <a:pPr algn="l">
-              <a:lnSpc>
-                <a:spcPct val="125000"/>
-              </a:lnSpc>
-            </a:pPr>
-            <a:r>
-              <a:rPr sz="1200" b="0" i="0">
-                <a:solidFill>
-                  <a:srgbClr val="1A1A1A"/>
-                </a:solidFill>
-                <a:latin typeface="Helvetica Neue"/>
-              </a:rPr>
-              <a:t>On every model-versus-baseline gap, resampling subjects together. A 2.4% edge without an interval is not a result.</a:t>
-            </a:r>
-          </a:p>
-        </p:txBody>
-      </p:sp>
-      <p:sp>
-        <p:nvSpPr>
-          <p:cNvPr id="13" name="Rectangle 12"/>
+              <a:t>Five times the data, same conclusion</a:t>
+            </a:r>
+          </a:p>
+        </p:txBody>
+      </p:sp>
+      <p:sp>
+        <p:nvSpPr>
+          <p:cNvPr id="4" name="Rectangle 3"/>
           <p:cNvSpPr/>
           <p:nvPr/>
         </p:nvSpPr>
         <p:spPr>
           <a:xfrm>
-            <a:off x="685800" y="5943600"/>
+            <a:off x="685800" y="1481328"/>
             <a:ext cx="10820095" cy="9525"/>
           </a:xfrm>
           <a:prstGeom prst="rect">
@@ -4630,15 +4809,133 @@
           </a:p>
         </p:txBody>
       </p:sp>
-      <p:sp>
-        <p:nvSpPr>
-          <p:cNvPr id="14" name="TextBox 13"/>
-          <p:cNvSpPr txBox="1"/>
-          <p:nvPr/>
-        </p:nvSpPr>
-        <p:spPr>
-          <a:xfrm>
-            <a:off x="685800" y="6126480"/>
+      <p:pic>
+        <p:nvPicPr>
+          <p:cNvPr id="5" name="Picture 4" descr="autoregressive.png"/>
+          <p:cNvPicPr>
+            <a:picLocks noChangeAspect="1"/>
+          </p:cNvPicPr>
+          <p:nvPr/>
+        </p:nvPicPr>
+        <p:blipFill>
+          <a:blip r:embed="rId2"/>
+          <a:stretch>
+            <a:fillRect/>
+          </a:stretch>
+        </p:blipFill>
+        <p:spPr>
+          <a:xfrm>
+            <a:off x="2916699" y="1691640"/>
+            <a:ext cx="6358296" cy="2880360"/>
+          </a:xfrm>
+          <a:prstGeom prst="rect">
+            <a:avLst/>
+          </a:prstGeom>
+        </p:spPr>
+      </p:pic>
+      <p:sp>
+        <p:nvSpPr>
+          <p:cNvPr id="6" name="TextBox 5"/>
+          <p:cNvSpPr txBox="1"/>
+          <p:nvPr/>
+        </p:nvSpPr>
+        <p:spPr>
+          <a:xfrm>
+            <a:off x="685800" y="4800600"/>
+            <a:ext cx="10820095" cy="731520"/>
+          </a:xfrm>
+          <a:prstGeom prst="rect">
+            <a:avLst/>
+          </a:prstGeom>
+          <a:noFill/>
+        </p:spPr>
+        <p:txBody>
+          <a:bodyPr wrap="square">
+            <a:spAutoFit/>
+          </a:bodyPr>
+          <a:lstStyle/>
+          <a:p>
+            <a:pPr algn="l">
+              <a:lnSpc>
+                <a:spcPct val="130000"/>
+              </a:lnSpc>
+            </a:pPr>
+            <a:r>
+              <a:rPr sz="1600" b="1" i="0">
+                <a:solidFill>
+                  <a:srgbClr val="B2182B"/>
+                </a:solidFill>
+                <a:latin typeface="Helvetica Neue"/>
+              </a:rPr>
+              <a:t>Knowing a subject's own profile at time t does not beat simply knowing</a:t>
+            </a:r>
+          </a:p>
+          <a:p>
+            <a:pPr algn="l">
+              <a:lnSpc>
+                <a:spcPct val="130000"/>
+              </a:lnSpc>
+            </a:pPr>
+            <a:r>
+              <a:rPr sz="1600" b="1" i="0">
+                <a:solidFill>
+                  <a:srgbClr val="B2182B"/>
+                </a:solidFill>
+                <a:latin typeface="Helvetica Neue"/>
+              </a:rPr>
+              <a:t>what the cohort looks like at time t+1.</a:t>
+            </a:r>
+          </a:p>
+        </p:txBody>
+      </p:sp>
+      <p:sp>
+        <p:nvSpPr>
+          <p:cNvPr id="7" name="TextBox 6"/>
+          <p:cNvSpPr txBox="1"/>
+          <p:nvPr/>
+        </p:nvSpPr>
+        <p:spPr>
+          <a:xfrm>
+            <a:off x="685800" y="5623560"/>
+            <a:ext cx="10820095" cy="320040"/>
+          </a:xfrm>
+          <a:prstGeom prst="rect">
+            <a:avLst/>
+          </a:prstGeom>
+          <a:noFill/>
+        </p:spPr>
+        <p:txBody>
+          <a:bodyPr wrap="square">
+            <a:spAutoFit/>
+          </a:bodyPr>
+          <a:lstStyle/>
+          <a:p>
+            <a:pPr algn="l">
+              <a:lnSpc>
+                <a:spcPct val="100000"/>
+              </a:lnSpc>
+            </a:pPr>
+            <a:r>
+              <a:rPr sz="1300" b="1" i="0">
+                <a:solidFill>
+                  <a:srgbClr val="1A1A1A"/>
+                </a:solidFill>
+                <a:latin typeface="Helvetica Neue"/>
+              </a:rPr>
+              <a:t>6→9 months is the one window where the individual matters</a:t>
+            </a:r>
+          </a:p>
+        </p:txBody>
+      </p:sp>
+      <p:sp>
+        <p:nvSpPr>
+          <p:cNvPr id="8" name="TextBox 7"/>
+          <p:cNvSpPr txBox="1"/>
+          <p:nvPr/>
+        </p:nvSpPr>
+        <p:spPr>
+          <a:xfrm>
+            <a:off x="685800" y="5952744"/>
             <a:ext cx="10820095" cy="457200"/>
           </a:xfrm>
           <a:prstGeom prst="rect">
@@ -4654,17 +4951,17 @@
           <a:p>
             <a:pPr algn="l">
               <a:lnSpc>
-                <a:spcPct val="100000"/>
-              </a:lnSpc>
-            </a:pPr>
-            <a:r>
-              <a:rPr sz="1250" b="1" i="0">
-                <a:solidFill>
-                  <a:srgbClr val="1A1A1A"/>
-                </a:solidFill>
-                <a:latin typeface="Helvetica Neue"/>
-              </a:rPr>
-              <a:t>Reach for the pairing-destroyed null in any longitudinal change-score analysis where baseline is also a feature.</a:t>
+                <a:spcPct val="125000"/>
+              </a:lnSpc>
+            </a:pPr>
+            <a:r>
+              <a:rPr sz="1150" b="0" i="0">
+                <a:solidFill>
+                  <a:srgbClr val="666666"/>
+                </a:solidFill>
+                <a:latin typeface="Helvetica Neue"/>
+              </a:rPr>
+              <a:t>the only transition where the model beats BOTH persistence and the mean — n=90, one window of four, uncorrected for multiplicity</a:t>
             </a:r>
           </a:p>
         </p:txBody>
@@ -4677,7 +4974,1090 @@
 </p:sld>
 </file>
 
-<file path=ppt/slides/slide13.xml><?xml version="1.0" encoding="utf-8"?>
+<file path=ppt/slides/slide14.xml><?xml version="1.0" encoding="utf-8"?>
+<p:sld xmlns:a="http://schemas.openxmlformats.org/drawingml/2006/main" xmlns:p="http://schemas.openxmlformats.org/presentationml/2006/main" xmlns:r="http://schemas.openxmlformats.org/officeDocument/2006/relationships">
+  <p:cSld>
+    <p:spTree>
+      <p:nvGrpSpPr>
+        <p:cNvPr id="1" name=""/>
+        <p:cNvGrpSpPr/>
+        <p:nvPr/>
+      </p:nvGrpSpPr>
+      <p:grpSpPr/>
+      <p:sp>
+        <p:nvSpPr>
+          <p:cNvPr id="2" name="TextBox 1"/>
+          <p:cNvSpPr txBox="1"/>
+          <p:nvPr/>
+        </p:nvSpPr>
+        <p:spPr>
+          <a:xfrm>
+            <a:off x="685800" y="384048"/>
+            <a:ext cx="10820095" cy="274320"/>
+          </a:xfrm>
+          <a:prstGeom prst="rect">
+            <a:avLst/>
+          </a:prstGeom>
+          <a:noFill/>
+        </p:spPr>
+        <p:txBody>
+          <a:bodyPr wrap="square">
+            <a:spAutoFit/>
+          </a:bodyPr>
+          <a:lstStyle/>
+          <a:p>
+            <a:pPr algn="l">
+              <a:lnSpc>
+                <a:spcPct val="100000"/>
+              </a:lnSpc>
+            </a:pPr>
+            <a:r>
+              <a:rPr sz="1100" b="1" i="0">
+                <a:solidFill>
+                  <a:srgbClr val="666666"/>
+                </a:solidFill>
+                <a:latin typeface="Helvetica Neue"/>
+              </a:rPr>
+              <a:t>USING EVERY TIME POINT</a:t>
+            </a:r>
+          </a:p>
+        </p:txBody>
+      </p:sp>
+      <p:sp>
+        <p:nvSpPr>
+          <p:cNvPr id="3" name="TextBox 2"/>
+          <p:cNvSpPr txBox="1"/>
+          <p:nvPr/>
+        </p:nvSpPr>
+        <p:spPr>
+          <a:xfrm>
+            <a:off x="685800" y="658368"/>
+            <a:ext cx="10820095" cy="822960"/>
+          </a:xfrm>
+          <a:prstGeom prst="rect">
+            <a:avLst/>
+          </a:prstGeom>
+          <a:noFill/>
+        </p:spPr>
+        <p:txBody>
+          <a:bodyPr wrap="square">
+            <a:spAutoFit/>
+          </a:bodyPr>
+          <a:lstStyle/>
+          <a:p>
+            <a:pPr algn="l">
+              <a:lnSpc>
+                <a:spcPct val="100000"/>
+              </a:lnSpc>
+            </a:pPr>
+            <a:r>
+              <a:rPr sz="2700" b="1" i="0">
+                <a:solidFill>
+                  <a:srgbClr val="1A1A1A"/>
+                </a:solidFill>
+                <a:latin typeface="Helvetica Neue"/>
+              </a:rPr>
+              <a:t>Iterated vs direct — walking the trajectory loses</a:t>
+            </a:r>
+          </a:p>
+        </p:txBody>
+      </p:sp>
+      <p:sp>
+        <p:nvSpPr>
+          <p:cNvPr id="4" name="Rectangle 3"/>
+          <p:cNvSpPr/>
+          <p:nvPr/>
+        </p:nvSpPr>
+        <p:spPr>
+          <a:xfrm>
+            <a:off x="685800" y="1481328"/>
+            <a:ext cx="10820095" cy="9525"/>
+          </a:xfrm>
+          <a:prstGeom prst="rect">
+            <a:avLst/>
+          </a:prstGeom>
+          <a:solidFill>
+            <a:srgbClr val="DDDDDD"/>
+          </a:solidFill>
+          <a:ln>
+            <a:noFill/>
+          </a:ln>
+          <a:effectLst/>
+        </p:spPr>
+        <p:style>
+          <a:lnRef idx="1">
+            <a:schemeClr val="accent1"/>
+          </a:lnRef>
+          <a:fillRef idx="3">
+            <a:schemeClr val="accent1"/>
+          </a:fillRef>
+          <a:effectRef idx="2">
+            <a:schemeClr val="accent1"/>
+          </a:effectRef>
+          <a:fontRef idx="minor">
+            <a:schemeClr val="lt1"/>
+          </a:fontRef>
+        </p:style>
+        <p:txBody>
+          <a:bodyPr rtlCol="0" anchor="ctr"/>
+          <a:lstStyle/>
+          <a:p>
+            <a:pPr algn="ctr"/>
+          </a:p>
+        </p:txBody>
+      </p:sp>
+      <p:sp>
+        <p:nvSpPr>
+          <p:cNvPr id="5" name="TextBox 4"/>
+          <p:cNvSpPr txBox="1"/>
+          <p:nvPr/>
+        </p:nvSpPr>
+        <p:spPr>
+          <a:xfrm>
+            <a:off x="685800" y="1737360"/>
+            <a:ext cx="10820095" cy="731520"/>
+          </a:xfrm>
+          <a:prstGeom prst="rect">
+            <a:avLst/>
+          </a:prstGeom>
+          <a:noFill/>
+        </p:spPr>
+        <p:txBody>
+          <a:bodyPr wrap="square">
+            <a:spAutoFit/>
+          </a:bodyPr>
+          <a:lstStyle/>
+          <a:p>
+            <a:pPr algn="l">
+              <a:lnSpc>
+                <a:spcPct val="130000"/>
+              </a:lnSpc>
+            </a:pPr>
+            <a:r>
+              <a:rPr sz="1350" b="0" i="0">
+                <a:solidFill>
+                  <a:srgbClr val="1A1A1A"/>
+                </a:solidFill>
+                <a:latin typeface="Helvetica Neue"/>
+              </a:rPr>
+              <a:t>Rolling the one-step model forward four times (preop→3→6→9→12) and scoring at 12 months,</a:t>
+            </a:r>
+          </a:p>
+          <a:p>
+            <a:pPr algn="l">
+              <a:lnSpc>
+                <a:spcPct val="130000"/>
+              </a:lnSpc>
+            </a:pPr>
+            <a:r>
+              <a:rPr sz="1350" b="0" i="0">
+                <a:solidFill>
+                  <a:srgbClr val="1A1A1A"/>
+                </a:solidFill>
+                <a:latin typeface="Helvetica Neue"/>
+              </a:rPr>
+              <a:t>against the direct preop→12mo ridge, on the same 60 complete subjects.</a:t>
+            </a:r>
+          </a:p>
+        </p:txBody>
+      </p:sp>
+      <p:sp>
+        <p:nvSpPr>
+          <p:cNvPr id="6" name="TextBox 5"/>
+          <p:cNvSpPr txBox="1"/>
+          <p:nvPr/>
+        </p:nvSpPr>
+        <p:spPr>
+          <a:xfrm>
+            <a:off x="685800" y="2743200"/>
+            <a:ext cx="3606698" cy="731520"/>
+          </a:xfrm>
+          <a:prstGeom prst="rect">
+            <a:avLst/>
+          </a:prstGeom>
+          <a:noFill/>
+        </p:spPr>
+        <p:txBody>
+          <a:bodyPr wrap="square">
+            <a:spAutoFit/>
+          </a:bodyPr>
+          <a:lstStyle/>
+          <a:p>
+            <a:pPr algn="ctr">
+              <a:lnSpc>
+                <a:spcPct val="100000"/>
+              </a:lnSpc>
+            </a:pPr>
+            <a:r>
+              <a:rPr sz="4000" b="1" i="0">
+                <a:solidFill>
+                  <a:srgbClr val="666666"/>
+                </a:solidFill>
+                <a:latin typeface="Helvetica Neue"/>
+              </a:rPr>
+              <a:t>0.415</a:t>
+            </a:r>
+          </a:p>
+        </p:txBody>
+      </p:sp>
+      <p:sp>
+        <p:nvSpPr>
+          <p:cNvPr id="7" name="TextBox 6"/>
+          <p:cNvSpPr txBox="1"/>
+          <p:nvPr/>
+        </p:nvSpPr>
+        <p:spPr>
+          <a:xfrm>
+            <a:off x="685800" y="3456432"/>
+            <a:ext cx="3606698" cy="548640"/>
+          </a:xfrm>
+          <a:prstGeom prst="rect">
+            <a:avLst/>
+          </a:prstGeom>
+          <a:noFill/>
+        </p:spPr>
+        <p:txBody>
+          <a:bodyPr wrap="square">
+            <a:spAutoFit/>
+          </a:bodyPr>
+          <a:lstStyle/>
+          <a:p>
+            <a:pPr algn="ctr">
+              <a:lnSpc>
+                <a:spcPct val="100000"/>
+              </a:lnSpc>
+            </a:pPr>
+            <a:r>
+              <a:rPr sz="1100" b="0" i="0">
+                <a:solidFill>
+                  <a:srgbClr val="666666"/>
+                </a:solidFill>
+                <a:latin typeface="Helvetica Neue"/>
+              </a:rPr>
+              <a:t>persistence</a:t>
+            </a:r>
+          </a:p>
+        </p:txBody>
+      </p:sp>
+      <p:sp>
+        <p:nvSpPr>
+          <p:cNvPr id="8" name="TextBox 7"/>
+          <p:cNvSpPr txBox="1"/>
+          <p:nvPr/>
+        </p:nvSpPr>
+        <p:spPr>
+          <a:xfrm>
+            <a:off x="4292498" y="2743200"/>
+            <a:ext cx="3606698" cy="731520"/>
+          </a:xfrm>
+          <a:prstGeom prst="rect">
+            <a:avLst/>
+          </a:prstGeom>
+          <a:noFill/>
+        </p:spPr>
+        <p:txBody>
+          <a:bodyPr wrap="square">
+            <a:spAutoFit/>
+          </a:bodyPr>
+          <a:lstStyle/>
+          <a:p>
+            <a:pPr algn="ctr">
+              <a:lnSpc>
+                <a:spcPct val="100000"/>
+              </a:lnSpc>
+            </a:pPr>
+            <a:r>
+              <a:rPr sz="4000" b="1" i="0">
+                <a:solidFill>
+                  <a:srgbClr val="B2182B"/>
+                </a:solidFill>
+                <a:latin typeface="Helvetica Neue"/>
+              </a:rPr>
+              <a:t>0.320</a:t>
+            </a:r>
+          </a:p>
+        </p:txBody>
+      </p:sp>
+      <p:sp>
+        <p:nvSpPr>
+          <p:cNvPr id="9" name="TextBox 8"/>
+          <p:cNvSpPr txBox="1"/>
+          <p:nvPr/>
+        </p:nvSpPr>
+        <p:spPr>
+          <a:xfrm>
+            <a:off x="4292498" y="3456432"/>
+            <a:ext cx="3606698" cy="548640"/>
+          </a:xfrm>
+          <a:prstGeom prst="rect">
+            <a:avLst/>
+          </a:prstGeom>
+          <a:noFill/>
+        </p:spPr>
+        <p:txBody>
+          <a:bodyPr wrap="square">
+            <a:spAutoFit/>
+          </a:bodyPr>
+          <a:lstStyle/>
+          <a:p>
+            <a:pPr algn="ctr">
+              <a:lnSpc>
+                <a:spcPct val="100000"/>
+              </a:lnSpc>
+            </a:pPr>
+            <a:r>
+              <a:rPr sz="1100" b="0" i="0">
+                <a:solidFill>
+                  <a:srgbClr val="666666"/>
+                </a:solidFill>
+                <a:latin typeface="Helvetica Neue"/>
+              </a:rPr>
+              <a:t>iterated</a:t>
+            </a:r>
+          </a:p>
+          <a:p>
+            <a:pPr algn="ctr">
+              <a:lnSpc>
+                <a:spcPct val="100000"/>
+              </a:lnSpc>
+            </a:pPr>
+            <a:r>
+              <a:rPr sz="1100" b="0" i="0">
+                <a:solidFill>
+                  <a:srgbClr val="666666"/>
+                </a:solidFill>
+                <a:latin typeface="Helvetica Neue"/>
+              </a:rPr>
+              <a:t>preop→3→6→9→12</a:t>
+            </a:r>
+          </a:p>
+        </p:txBody>
+      </p:sp>
+      <p:sp>
+        <p:nvSpPr>
+          <p:cNvPr id="10" name="TextBox 9"/>
+          <p:cNvSpPr txBox="1"/>
+          <p:nvPr/>
+        </p:nvSpPr>
+        <p:spPr>
+          <a:xfrm>
+            <a:off x="7899196" y="2743200"/>
+            <a:ext cx="3606698" cy="731520"/>
+          </a:xfrm>
+          <a:prstGeom prst="rect">
+            <a:avLst/>
+          </a:prstGeom>
+          <a:noFill/>
+        </p:spPr>
+        <p:txBody>
+          <a:bodyPr wrap="square">
+            <a:spAutoFit/>
+          </a:bodyPr>
+          <a:lstStyle/>
+          <a:p>
+            <a:pPr algn="ctr">
+              <a:lnSpc>
+                <a:spcPct val="100000"/>
+              </a:lnSpc>
+            </a:pPr>
+            <a:r>
+              <a:rPr sz="4000" b="1" i="0">
+                <a:solidFill>
+                  <a:srgbClr val="1F6F8B"/>
+                </a:solidFill>
+                <a:latin typeface="Helvetica Neue"/>
+              </a:rPr>
+              <a:t>0.299</a:t>
+            </a:r>
+          </a:p>
+        </p:txBody>
+      </p:sp>
+      <p:sp>
+        <p:nvSpPr>
+          <p:cNvPr id="11" name="TextBox 10"/>
+          <p:cNvSpPr txBox="1"/>
+          <p:nvPr/>
+        </p:nvSpPr>
+        <p:spPr>
+          <a:xfrm>
+            <a:off x="7899196" y="3456432"/>
+            <a:ext cx="3606698" cy="548640"/>
+          </a:xfrm>
+          <a:prstGeom prst="rect">
+            <a:avLst/>
+          </a:prstGeom>
+          <a:noFill/>
+        </p:spPr>
+        <p:txBody>
+          <a:bodyPr wrap="square">
+            <a:spAutoFit/>
+          </a:bodyPr>
+          <a:lstStyle/>
+          <a:p>
+            <a:pPr algn="ctr">
+              <a:lnSpc>
+                <a:spcPct val="100000"/>
+              </a:lnSpc>
+            </a:pPr>
+            <a:r>
+              <a:rPr sz="1100" b="0" i="0">
+                <a:solidFill>
+                  <a:srgbClr val="666666"/>
+                </a:solidFill>
+                <a:latin typeface="Helvetica Neue"/>
+              </a:rPr>
+              <a:t>direct</a:t>
+            </a:r>
+          </a:p>
+          <a:p>
+            <a:pPr algn="ctr">
+              <a:lnSpc>
+                <a:spcPct val="100000"/>
+              </a:lnSpc>
+            </a:pPr>
+            <a:r>
+              <a:rPr sz="1100" b="0" i="0">
+                <a:solidFill>
+                  <a:srgbClr val="666666"/>
+                </a:solidFill>
+                <a:latin typeface="Helvetica Neue"/>
+              </a:rPr>
+              <a:t>preop→12mo</a:t>
+            </a:r>
+          </a:p>
+        </p:txBody>
+      </p:sp>
+      <p:sp>
+        <p:nvSpPr>
+          <p:cNvPr id="12" name="TextBox 11"/>
+          <p:cNvSpPr txBox="1"/>
+          <p:nvPr/>
+        </p:nvSpPr>
+        <p:spPr>
+          <a:xfrm>
+            <a:off x="685800" y="4480560"/>
+            <a:ext cx="10820095" cy="1645920"/>
+          </a:xfrm>
+          <a:prstGeom prst="rect">
+            <a:avLst/>
+          </a:prstGeom>
+          <a:noFill/>
+        </p:spPr>
+        <p:txBody>
+          <a:bodyPr wrap="square">
+            <a:spAutoFit/>
+          </a:bodyPr>
+          <a:lstStyle/>
+          <a:p>
+            <a:pPr algn="l">
+              <a:lnSpc>
+                <a:spcPct val="135000"/>
+              </a:lnSpc>
+            </a:pPr>
+            <a:r>
+              <a:rPr sz="1400" b="0" i="0">
+                <a:solidFill>
+                  <a:srgbClr val="1A1A1A"/>
+                </a:solidFill>
+                <a:latin typeface="Helvetica Neue"/>
+              </a:rPr>
+              <a:t>Iterated − direct = +0.021 (95% CI +0.004 to +0.037) — the interval excludes zero.</a:t>
+            </a:r>
+          </a:p>
+          <a:p>
+            <a:pPr algn="l">
+              <a:lnSpc>
+                <a:spcPct val="135000"/>
+              </a:lnSpc>
+            </a:pPr>
+            <a:r>
+              <a:rPr sz="1400" b="0" i="0">
+                <a:solidFill>
+                  <a:srgbClr val="1A1A1A"/>
+                </a:solidFill>
+                <a:latin typeface="Helvetica Neue"/>
+              </a:rPr>
+              <a:t>Error compounds across four steps, and each step's shrinkage pulls the forecast further toward the mean.</a:t>
+            </a:r>
+          </a:p>
+          <a:p>
+            <a:pPr algn="l">
+              <a:lnSpc>
+                <a:spcPct val="135000"/>
+              </a:lnSpc>
+            </a:pPr>
+            <a:r>
+              <a:rPr sz="1400" b="0" i="0">
+                <a:solidFill>
+                  <a:srgbClr val="1A1A1A"/>
+                </a:solidFill>
+                <a:latin typeface="Helvetica Neue"/>
+              </a:rPr>
+              <a:t/>
+            </a:r>
+          </a:p>
+          <a:p>
+            <a:pPr algn="l">
+              <a:lnSpc>
+                <a:spcPct val="135000"/>
+              </a:lnSpc>
+            </a:pPr>
+            <a:r>
+              <a:rPr sz="1400" b="0" i="0">
+                <a:solidFill>
+                  <a:srgbClr val="1A1A1A"/>
+                </a:solidFill>
+                <a:latin typeface="Helvetica Neue"/>
+              </a:rPr>
+              <a:t>If you want the 12-month profile, forecast it directly.</a:t>
+            </a:r>
+          </a:p>
+        </p:txBody>
+      </p:sp>
+    </p:spTree>
+  </p:cSld>
+  <p:clrMapOvr>
+    <a:masterClrMapping/>
+  </p:clrMapOvr>
+</p:sld>
+</file>
+
+<file path=ppt/slides/slide15.xml><?xml version="1.0" encoding="utf-8"?>
+<p:sld xmlns:a="http://schemas.openxmlformats.org/drawingml/2006/main" xmlns:p="http://schemas.openxmlformats.org/presentationml/2006/main" xmlns:r="http://schemas.openxmlformats.org/officeDocument/2006/relationships">
+  <p:cSld>
+    <p:spTree>
+      <p:nvGrpSpPr>
+        <p:cNvPr id="1" name=""/>
+        <p:cNvGrpSpPr/>
+        <p:nvPr/>
+      </p:nvGrpSpPr>
+      <p:grpSpPr/>
+      <p:sp>
+        <p:nvSpPr>
+          <p:cNvPr id="2" name="TextBox 1"/>
+          <p:cNvSpPr txBox="1"/>
+          <p:nvPr/>
+        </p:nvSpPr>
+        <p:spPr>
+          <a:xfrm>
+            <a:off x="685800" y="384048"/>
+            <a:ext cx="10820095" cy="274320"/>
+          </a:xfrm>
+          <a:prstGeom prst="rect">
+            <a:avLst/>
+          </a:prstGeom>
+          <a:noFill/>
+        </p:spPr>
+        <p:txBody>
+          <a:bodyPr wrap="square">
+            <a:spAutoFit/>
+          </a:bodyPr>
+          <a:lstStyle/>
+          <a:p>
+            <a:pPr algn="l">
+              <a:lnSpc>
+                <a:spcPct val="100000"/>
+              </a:lnSpc>
+            </a:pPr>
+            <a:r>
+              <a:rPr sz="1100" b="1" i="0">
+                <a:solidFill>
+                  <a:srgbClr val="666666"/>
+                </a:solidFill>
+                <a:latin typeface="Helvetica Neue"/>
+              </a:rPr>
+              <a:t>TAKEAWAY</a:t>
+            </a:r>
+          </a:p>
+        </p:txBody>
+      </p:sp>
+      <p:sp>
+        <p:nvSpPr>
+          <p:cNvPr id="3" name="TextBox 2"/>
+          <p:cNvSpPr txBox="1"/>
+          <p:nvPr/>
+        </p:nvSpPr>
+        <p:spPr>
+          <a:xfrm>
+            <a:off x="685800" y="658368"/>
+            <a:ext cx="10820095" cy="822960"/>
+          </a:xfrm>
+          <a:prstGeom prst="rect">
+            <a:avLst/>
+          </a:prstGeom>
+          <a:noFill/>
+        </p:spPr>
+        <p:txBody>
+          <a:bodyPr wrap="square">
+            <a:spAutoFit/>
+          </a:bodyPr>
+          <a:lstStyle/>
+          <a:p>
+            <a:pPr algn="l">
+              <a:lnSpc>
+                <a:spcPct val="100000"/>
+              </a:lnSpc>
+            </a:pPr>
+            <a:r>
+              <a:rPr sz="2700" b="1" i="0">
+                <a:solidFill>
+                  <a:srgbClr val="1A1A1A"/>
+                </a:solidFill>
+                <a:latin typeface="Helvetica Neue"/>
+              </a:rPr>
+              <a:t>The controls, reusable</a:t>
+            </a:r>
+          </a:p>
+        </p:txBody>
+      </p:sp>
+      <p:sp>
+        <p:nvSpPr>
+          <p:cNvPr id="4" name="Rectangle 3"/>
+          <p:cNvSpPr/>
+          <p:nvPr/>
+        </p:nvSpPr>
+        <p:spPr>
+          <a:xfrm>
+            <a:off x="685800" y="1481328"/>
+            <a:ext cx="10820095" cy="9525"/>
+          </a:xfrm>
+          <a:prstGeom prst="rect">
+            <a:avLst/>
+          </a:prstGeom>
+          <a:solidFill>
+            <a:srgbClr val="DDDDDD"/>
+          </a:solidFill>
+          <a:ln>
+            <a:noFill/>
+          </a:ln>
+          <a:effectLst/>
+        </p:spPr>
+        <p:style>
+          <a:lnRef idx="1">
+            <a:schemeClr val="accent1"/>
+          </a:lnRef>
+          <a:fillRef idx="3">
+            <a:schemeClr val="accent1"/>
+          </a:fillRef>
+          <a:effectRef idx="2">
+            <a:schemeClr val="accent1"/>
+          </a:effectRef>
+          <a:fontRef idx="minor">
+            <a:schemeClr val="lt1"/>
+          </a:fontRef>
+        </p:style>
+        <p:txBody>
+          <a:bodyPr rtlCol="0" anchor="ctr"/>
+          <a:lstStyle/>
+          <a:p>
+            <a:pPr algn="ctr"/>
+          </a:p>
+        </p:txBody>
+      </p:sp>
+      <p:sp>
+        <p:nvSpPr>
+          <p:cNvPr id="5" name="TextBox 4"/>
+          <p:cNvSpPr txBox="1"/>
+          <p:nvPr/>
+        </p:nvSpPr>
+        <p:spPr>
+          <a:xfrm>
+            <a:off x="685800" y="1828800"/>
+            <a:ext cx="3017520" cy="365760"/>
+          </a:xfrm>
+          <a:prstGeom prst="rect">
+            <a:avLst/>
+          </a:prstGeom>
+          <a:noFill/>
+        </p:spPr>
+        <p:txBody>
+          <a:bodyPr wrap="square">
+            <a:spAutoFit/>
+          </a:bodyPr>
+          <a:lstStyle/>
+          <a:p>
+            <a:pPr algn="l">
+              <a:lnSpc>
+                <a:spcPct val="100000"/>
+              </a:lnSpc>
+            </a:pPr>
+            <a:r>
+              <a:rPr sz="1450" b="1" i="0">
+                <a:solidFill>
+                  <a:srgbClr val="1F6F8B"/>
+                </a:solidFill>
+                <a:latin typeface="Helvetica Neue"/>
+              </a:rPr>
+              <a:t>No-learning scorer</a:t>
+            </a:r>
+          </a:p>
+        </p:txBody>
+      </p:sp>
+      <p:sp>
+        <p:nvSpPr>
+          <p:cNvPr id="6" name="TextBox 5"/>
+          <p:cNvSpPr txBox="1"/>
+          <p:nvPr/>
+        </p:nvSpPr>
+        <p:spPr>
+          <a:xfrm>
+            <a:off x="3886200" y="1828800"/>
+            <a:ext cx="7619695" cy="731520"/>
+          </a:xfrm>
+          <a:prstGeom prst="rect">
+            <a:avLst/>
+          </a:prstGeom>
+          <a:noFill/>
+        </p:spPr>
+        <p:txBody>
+          <a:bodyPr wrap="square">
+            <a:spAutoFit/>
+          </a:bodyPr>
+          <a:lstStyle/>
+          <a:p>
+            <a:pPr algn="l">
+              <a:lnSpc>
+                <a:spcPct val="125000"/>
+              </a:lnSpc>
+            </a:pPr>
+            <a:r>
+              <a:rPr sz="1200" b="0" i="0">
+                <a:solidFill>
+                  <a:srgbClr val="1A1A1A"/>
+                </a:solidFill>
+                <a:latin typeface="Helvetica Neue"/>
+              </a:rPr>
+              <a:t>Sum of signed, z-scored baseline markers. Catches a model that has not converged or has learned nothing its inputs did not already say. Every trained model is reported next to it.</a:t>
+            </a:r>
+          </a:p>
+        </p:txBody>
+      </p:sp>
+      <p:sp>
+        <p:nvSpPr>
+          <p:cNvPr id="7" name="TextBox 6"/>
+          <p:cNvSpPr txBox="1"/>
+          <p:nvPr/>
+        </p:nvSpPr>
+        <p:spPr>
+          <a:xfrm>
+            <a:off x="685800" y="2834640"/>
+            <a:ext cx="3017520" cy="365760"/>
+          </a:xfrm>
+          <a:prstGeom prst="rect">
+            <a:avLst/>
+          </a:prstGeom>
+          <a:noFill/>
+        </p:spPr>
+        <p:txBody>
+          <a:bodyPr wrap="square">
+            <a:spAutoFit/>
+          </a:bodyPr>
+          <a:lstStyle/>
+          <a:p>
+            <a:pPr algn="l">
+              <a:lnSpc>
+                <a:spcPct val="100000"/>
+              </a:lnSpc>
+            </a:pPr>
+            <a:r>
+              <a:rPr sz="1450" b="1" i="0">
+                <a:solidFill>
+                  <a:srgbClr val="1F6F8B"/>
+                </a:solidFill>
+                <a:latin typeface="Helvetica Neue"/>
+              </a:rPr>
+              <a:t>Pairing-destroyed null</a:t>
+            </a:r>
+          </a:p>
+        </p:txBody>
+      </p:sp>
+      <p:sp>
+        <p:nvSpPr>
+          <p:cNvPr id="8" name="TextBox 7"/>
+          <p:cNvSpPr txBox="1"/>
+          <p:nvPr/>
+        </p:nvSpPr>
+        <p:spPr>
+          <a:xfrm>
+            <a:off x="3886200" y="2834640"/>
+            <a:ext cx="7619695" cy="731520"/>
+          </a:xfrm>
+          <a:prstGeom prst="rect">
+            <a:avLst/>
+          </a:prstGeom>
+          <a:noFill/>
+        </p:spPr>
+        <p:txBody>
+          <a:bodyPr wrap="square">
+            <a:spAutoFit/>
+          </a:bodyPr>
+          <a:lstStyle/>
+          <a:p>
+            <a:pPr algn="l">
+              <a:lnSpc>
+                <a:spcPct val="125000"/>
+              </a:lnSpc>
+            </a:pPr>
+            <a:r>
+              <a:rPr sz="1200" b="0" i="0">
+                <a:solidFill>
+                  <a:srgbClr val="1A1A1A"/>
+                </a:solidFill>
+                <a:latin typeface="Helvetica Neue"/>
+              </a:rPr>
+              <a:t>Shuffle which future belongs to which subject, then rebuild the outcome from scratch. Catches an outcome manufactured from the features. This is the one that mattered.</a:t>
+            </a:r>
+          </a:p>
+        </p:txBody>
+      </p:sp>
+      <p:sp>
+        <p:nvSpPr>
+          <p:cNvPr id="9" name="TextBox 8"/>
+          <p:cNvSpPr txBox="1"/>
+          <p:nvPr/>
+        </p:nvSpPr>
+        <p:spPr>
+          <a:xfrm>
+            <a:off x="685800" y="3840480"/>
+            <a:ext cx="3017520" cy="365760"/>
+          </a:xfrm>
+          <a:prstGeom prst="rect">
+            <a:avLst/>
+          </a:prstGeom>
+          <a:noFill/>
+        </p:spPr>
+        <p:txBody>
+          <a:bodyPr wrap="square">
+            <a:spAutoFit/>
+          </a:bodyPr>
+          <a:lstStyle/>
+          <a:p>
+            <a:pPr algn="l">
+              <a:lnSpc>
+                <a:spcPct val="100000"/>
+              </a:lnSpc>
+            </a:pPr>
+            <a:r>
+              <a:rPr sz="1450" b="1" i="0">
+                <a:solidFill>
+                  <a:srgbClr val="1F6F8B"/>
+                </a:solidFill>
+                <a:latin typeface="Helvetica Neue"/>
+              </a:rPr>
+              <a:t>Label-permutation test</a:t>
+            </a:r>
+          </a:p>
+        </p:txBody>
+      </p:sp>
+      <p:sp>
+        <p:nvSpPr>
+          <p:cNvPr id="10" name="TextBox 9"/>
+          <p:cNvSpPr txBox="1"/>
+          <p:nvPr/>
+        </p:nvSpPr>
+        <p:spPr>
+          <a:xfrm>
+            <a:off x="3886200" y="3840480"/>
+            <a:ext cx="7619695" cy="731520"/>
+          </a:xfrm>
+          <a:prstGeom prst="rect">
+            <a:avLst/>
+          </a:prstGeom>
+          <a:noFill/>
+        </p:spPr>
+        <p:txBody>
+          <a:bodyPr wrap="square">
+            <a:spAutoFit/>
+          </a:bodyPr>
+          <a:lstStyle/>
+          <a:p>
+            <a:pPr algn="l">
+              <a:lnSpc>
+                <a:spcPct val="125000"/>
+              </a:lnSpc>
+            </a:pPr>
+            <a:r>
+              <a:rPr sz="1200" b="0" i="0">
+                <a:solidFill>
+                  <a:srgbClr val="1A1A1A"/>
+                </a:solidFill>
+                <a:latin typeface="Helvetica Neue"/>
+              </a:rPr>
+              <a:t>Necessary, and demonstrably not sufficient — it returned p = 0.002 on the broken setup.</a:t>
+            </a:r>
+          </a:p>
+        </p:txBody>
+      </p:sp>
+      <p:sp>
+        <p:nvSpPr>
+          <p:cNvPr id="11" name="TextBox 10"/>
+          <p:cNvSpPr txBox="1"/>
+          <p:nvPr/>
+        </p:nvSpPr>
+        <p:spPr>
+          <a:xfrm>
+            <a:off x="685800" y="4846320"/>
+            <a:ext cx="3017520" cy="365760"/>
+          </a:xfrm>
+          <a:prstGeom prst="rect">
+            <a:avLst/>
+          </a:prstGeom>
+          <a:noFill/>
+        </p:spPr>
+        <p:txBody>
+          <a:bodyPr wrap="square">
+            <a:spAutoFit/>
+          </a:bodyPr>
+          <a:lstStyle/>
+          <a:p>
+            <a:pPr algn="l">
+              <a:lnSpc>
+                <a:spcPct val="100000"/>
+              </a:lnSpc>
+            </a:pPr>
+            <a:r>
+              <a:rPr sz="1450" b="1" i="0">
+                <a:solidFill>
+                  <a:srgbClr val="1F6F8B"/>
+                </a:solidFill>
+                <a:latin typeface="Helvetica Neue"/>
+              </a:rPr>
+              <a:t>Paired bootstrap intervals</a:t>
+            </a:r>
+          </a:p>
+        </p:txBody>
+      </p:sp>
+      <p:sp>
+        <p:nvSpPr>
+          <p:cNvPr id="12" name="TextBox 11"/>
+          <p:cNvSpPr txBox="1"/>
+          <p:nvPr/>
+        </p:nvSpPr>
+        <p:spPr>
+          <a:xfrm>
+            <a:off x="3886200" y="4846320"/>
+            <a:ext cx="7619695" cy="731520"/>
+          </a:xfrm>
+          <a:prstGeom prst="rect">
+            <a:avLst/>
+          </a:prstGeom>
+          <a:noFill/>
+        </p:spPr>
+        <p:txBody>
+          <a:bodyPr wrap="square">
+            <a:spAutoFit/>
+          </a:bodyPr>
+          <a:lstStyle/>
+          <a:p>
+            <a:pPr algn="l">
+              <a:lnSpc>
+                <a:spcPct val="125000"/>
+              </a:lnSpc>
+            </a:pPr>
+            <a:r>
+              <a:rPr sz="1200" b="0" i="0">
+                <a:solidFill>
+                  <a:srgbClr val="1A1A1A"/>
+                </a:solidFill>
+                <a:latin typeface="Helvetica Neue"/>
+              </a:rPr>
+              <a:t>On every model-versus-baseline gap, resampling subjects together. A 2.4% edge without an interval is not a result.</a:t>
+            </a:r>
+          </a:p>
+        </p:txBody>
+      </p:sp>
+      <p:sp>
+        <p:nvSpPr>
+          <p:cNvPr id="13" name="Rectangle 12"/>
+          <p:cNvSpPr/>
+          <p:nvPr/>
+        </p:nvSpPr>
+        <p:spPr>
+          <a:xfrm>
+            <a:off x="685800" y="5943600"/>
+            <a:ext cx="10820095" cy="9525"/>
+          </a:xfrm>
+          <a:prstGeom prst="rect">
+            <a:avLst/>
+          </a:prstGeom>
+          <a:solidFill>
+            <a:srgbClr val="DDDDDD"/>
+          </a:solidFill>
+          <a:ln>
+            <a:noFill/>
+          </a:ln>
+          <a:effectLst/>
+        </p:spPr>
+        <p:style>
+          <a:lnRef idx="1">
+            <a:schemeClr val="accent1"/>
+          </a:lnRef>
+          <a:fillRef idx="3">
+            <a:schemeClr val="accent1"/>
+          </a:fillRef>
+          <a:effectRef idx="2">
+            <a:schemeClr val="accent1"/>
+          </a:effectRef>
+          <a:fontRef idx="minor">
+            <a:schemeClr val="lt1"/>
+          </a:fontRef>
+        </p:style>
+        <p:txBody>
+          <a:bodyPr rtlCol="0" anchor="ctr"/>
+          <a:lstStyle/>
+          <a:p>
+            <a:pPr algn="ctr"/>
+          </a:p>
+        </p:txBody>
+      </p:sp>
+      <p:sp>
+        <p:nvSpPr>
+          <p:cNvPr id="14" name="TextBox 13"/>
+          <p:cNvSpPr txBox="1"/>
+          <p:nvPr/>
+        </p:nvSpPr>
+        <p:spPr>
+          <a:xfrm>
+            <a:off x="685800" y="6126480"/>
+            <a:ext cx="10820095" cy="457200"/>
+          </a:xfrm>
+          <a:prstGeom prst="rect">
+            <a:avLst/>
+          </a:prstGeom>
+          <a:noFill/>
+        </p:spPr>
+        <p:txBody>
+          <a:bodyPr wrap="square">
+            <a:spAutoFit/>
+          </a:bodyPr>
+          <a:lstStyle/>
+          <a:p>
+            <a:pPr algn="l">
+              <a:lnSpc>
+                <a:spcPct val="100000"/>
+              </a:lnSpc>
+            </a:pPr>
+            <a:r>
+              <a:rPr sz="1250" b="1" i="0">
+                <a:solidFill>
+                  <a:srgbClr val="1A1A1A"/>
+                </a:solidFill>
+                <a:latin typeface="Helvetica Neue"/>
+              </a:rPr>
+              <a:t>Reach for the pairing-destroyed null in any longitudinal change-score analysis where baseline is also a feature.</a:t>
+            </a:r>
+          </a:p>
+        </p:txBody>
+      </p:sp>
+    </p:spTree>
+  </p:cSld>
+  <p:clrMapOvr>
+    <a:masterClrMapping/>
+  </p:clrMapOvr>
+</p:sld>
+</file>
+
+<file path=ppt/slides/slide16.xml><?xml version="1.0" encoding="utf-8"?>
 <p:sld xmlns:a="http://schemas.openxmlformats.org/drawingml/2006/main" xmlns:p="http://schemas.openxmlformats.org/presentationml/2006/main" xmlns:r="http://schemas.openxmlformats.org/officeDocument/2006/relationships">
   <p:cSld>
     <p:spTree>
